--- a/cursos/recursos/el-mapa-de-los-finales/24-torre-y-peon-contra-alfil-y-dama-contra-torre.pptx
+++ b/cursos/recursos/el-mapa-de-los-finales/24-torre-y-peon-contra-alfil-y-dama-contra-torre.pptx
@@ -6848,7 +6848,7 @@
                 </a:solidFill>
                 <a:latin typeface="Calibri"/>
               </a:rPr>
-              <a:t>Jugá la fortaleza de dama contra torre y peón con ambos bandos contra el motor.</a:t>
+              <a:t>Juega la fortaleza de dama contra torre y peón con ambos bandos contra el motor.</a:t>
             </a:r>
           </a:p>
           <a:p>
@@ -6919,7 +6919,7 @@
                 </a:solidFill>
                 <a:latin typeface="Calibri"/>
               </a:rPr>
-              <a:t>•  Recorré cada línea principal hasta entender el porqué de cada jugada.</a:t>
+              <a:t>•  Recorre cada línea principal hasta entender el porqué de cada jugada.</a:t>
             </a:r>
           </a:p>
           <a:p>
@@ -6935,7 +6935,7 @@
                 </a:solidFill>
                 <a:latin typeface="Calibri"/>
               </a:rPr>
-              <a:t>•  Practicá primero las posiciones clave, después las demás.</a:t>
+              <a:t>•  Practica primero las posiciones clave, después las demás.</a:t>
             </a:r>
           </a:p>
           <a:p>
@@ -6951,7 +6951,7 @@
                 </a:solidFill>
                 <a:latin typeface="Calibri"/>
               </a:rPr>
-              <a:t>•  Anotá las reglas de cada final con tus palabras.</a:t>
+              <a:t>•  Anota las reglas de cada final con tus palabras.</a:t>
             </a:r>
           </a:p>
         </p:txBody>
